--- a/docs/pitch-deck-v3.pptx
+++ b/docs/pitch-deck-v3.pptx
@@ -4491,7 +4491,7 @@
                 </a:solidFill>
                 <a:latin typeface="Inter"/>
               </a:rPr>
-              <a:t>Project Lead: [NAME]   ·   Team: [PLACEHOLDER: team name]</a:t>
+              <a:t>Built solo by Ronald Ajusan   ·   Artisam Labs</a:t>
             </a:r>
           </a:p>
         </p:txBody>
@@ -5520,7 +5520,7 @@
                 </a:solidFill>
                 <a:latin typeface="Inter"/>
               </a:rPr>
-              <a:t>[PLACEHOLDER: name] — role</a:t>
+              <a:t>Ronald Ajusan — solo developer: full-stack, design, infrastructure</a:t>
             </a:r>
           </a:p>
           <a:p>
@@ -5548,7 +5548,7 @@
                 </a:solidFill>
                 <a:latin typeface="Inter"/>
               </a:rPr>
-              <a:t>[PLACEHOLDER: name] — role</a:t>
+              <a:t>Artisam Labs — artisam.xyz</a:t>
             </a:r>
           </a:p>
           <a:p>
@@ -5576,7 +5576,7 @@
                 </a:solidFill>
                 <a:latin typeface="Inter"/>
               </a:rPr>
-              <a:t>[PLACEHOLDER: name] — role</a:t>
+              <a:t>One person, end to end: payer, merchant, admin, settlement worker</a:t>
             </a:r>
           </a:p>
           <a:p>
@@ -5613,7 +5613,7 @@
                 </a:solidFill>
                 <a:latin typeface="Inter"/>
               </a:rPr>
-              <a:t> [PLACEHOLDER: email / handle / project URL]</a:t>
+              <a:t> ronaldajusan0@gmail.com   ·   github.com/ronaldajusan0/HeyPay</a:t>
             </a:r>
           </a:p>
           <a:p>
